--- a/results/ppt.pptx
+++ b/results/ppt.pptx
@@ -3135,7 +3135,7 @@
               </a:defRPr>
             </a:pPr>
             <a:r>
-              <a:t>Deep Learning Final Project 2026-2027 | Project ID: 29</a:t>
+              <a:t>Deep Learning Final Project 2026-2027</a:t>
             </a:r>
           </a:p>
         </p:txBody>
